--- a/m3/diapositivos/sessao-10-m3-f16.pptx
+++ b/m3/diapositivos/sessao-10-m3-f16.pptx
@@ -1887,11 +1887,8 @@
                 <a:ea typeface="Georgia" pitchFamily="34" charset="-122"/>
                 <a:cs typeface="Georgia" pitchFamily="34" charset="-120"/>
               </a:rPr>
-              <a:t>Cada turma prepara doze perguntas para a outra (quatro fáceis, quatro médias, quatro difíceis) sobre lírica, épica, contexto e gramática, com resposta e fonte (lição, verso, página).</a:t>
-            </a:r>
-            <a:endParaRPr lang="en-US" sz="2300" dirty="0"/>
-          </a:p>
-          <a:p>
+              <a:t>Cada turma prepara </a:t>
+            </a:r>
             <a:pPr indent="0" marL="0">
               <a:lnSpc>
                 <a:spcPct val="120000"/>
@@ -1902,7 +1899,7 @@
               <a:buNone/>
             </a:pPr>
             <a:r>
-              <a:rPr lang="en-US" sz="2300" dirty="0">
+              <a:rPr lang="en-US" sz="2300" b="1" dirty="0">
                 <a:solidFill>
                   <a:srgbClr val="F2F0EA"/>
                 </a:solidFill>
@@ -1910,7 +1907,210 @@
                 <a:ea typeface="Georgia" pitchFamily="34" charset="-122"/>
                 <a:cs typeface="Georgia" pitchFamily="34" charset="-120"/>
               </a:rPr>
-              <a:t>Rondas: 1. Quem disse? (dado o verso, dizer o poema); 2. Recurso relâmpago; 3. Métrica ao vivo (contar sílabas); 4. Defende em 30 segundos (uma tese sobre Camões).</a:t>
+              <a:t>doze perguntas</a:t>
+            </a:r>
+            <a:pPr indent="0" marL="0">
+              <a:lnSpc>
+                <a:spcPct val="120000"/>
+              </a:lnSpc>
+              <a:spcAft>
+                <a:spcPts val="1000"/>
+              </a:spcAft>
+              <a:buNone/>
+            </a:pPr>
+            <a:r>
+              <a:rPr lang="en-US" sz="2300" dirty="0">
+                <a:solidFill>
+                  <a:srgbClr val="F2F0EA"/>
+                </a:solidFill>
+                <a:latin typeface="Georgia" pitchFamily="34" charset="0"/>
+                <a:ea typeface="Georgia" pitchFamily="34" charset="-122"/>
+                <a:cs typeface="Georgia" pitchFamily="34" charset="-120"/>
+              </a:rPr>
+              <a:t> para a outra (quatro fáceis, quatro médias, quatro difíceis) sobre lírica, épica, contexto e gramática, com resposta e fonte (lição, verso, página).</a:t>
+            </a:r>
+            <a:endParaRPr lang="en-US" sz="2300" dirty="0"/>
+          </a:p>
+          <a:p>
+            <a:pPr indent="0" marL="0">
+              <a:lnSpc>
+                <a:spcPct val="120000"/>
+              </a:lnSpc>
+              <a:spcAft>
+                <a:spcPts val="1000"/>
+              </a:spcAft>
+              <a:buNone/>
+            </a:pPr>
+            <a:r>
+              <a:rPr lang="en-US" sz="2300" dirty="0">
+                <a:solidFill>
+                  <a:srgbClr val="F2F0EA"/>
+                </a:solidFill>
+                <a:latin typeface="Georgia" pitchFamily="34" charset="0"/>
+                <a:ea typeface="Georgia" pitchFamily="34" charset="-122"/>
+                <a:cs typeface="Georgia" pitchFamily="34" charset="-120"/>
+              </a:rPr>
+              <a:t>Rondas: 1. </a:t>
+            </a:r>
+            <a:pPr indent="0" marL="0">
+              <a:lnSpc>
+                <a:spcPct val="120000"/>
+              </a:lnSpc>
+              <a:spcAft>
+                <a:spcPts val="1000"/>
+              </a:spcAft>
+              <a:buNone/>
+            </a:pPr>
+            <a:r>
+              <a:rPr lang="en-US" sz="2300" b="1" dirty="0">
+                <a:solidFill>
+                  <a:srgbClr val="F2F0EA"/>
+                </a:solidFill>
+                <a:latin typeface="Georgia" pitchFamily="34" charset="0"/>
+                <a:ea typeface="Georgia" pitchFamily="34" charset="-122"/>
+                <a:cs typeface="Georgia" pitchFamily="34" charset="-120"/>
+              </a:rPr>
+              <a:t>Quem disse?</a:t>
+            </a:r>
+            <a:pPr indent="0" marL="0">
+              <a:lnSpc>
+                <a:spcPct val="120000"/>
+              </a:lnSpc>
+              <a:spcAft>
+                <a:spcPts val="1000"/>
+              </a:spcAft>
+              <a:buNone/>
+            </a:pPr>
+            <a:r>
+              <a:rPr lang="en-US" sz="2300" dirty="0">
+                <a:solidFill>
+                  <a:srgbClr val="F2F0EA"/>
+                </a:solidFill>
+                <a:latin typeface="Georgia" pitchFamily="34" charset="0"/>
+                <a:ea typeface="Georgia" pitchFamily="34" charset="-122"/>
+                <a:cs typeface="Georgia" pitchFamily="34" charset="-120"/>
+              </a:rPr>
+              <a:t> (dado o verso, dizer o poema); 2. </a:t>
+            </a:r>
+            <a:pPr indent="0" marL="0">
+              <a:lnSpc>
+                <a:spcPct val="120000"/>
+              </a:lnSpc>
+              <a:spcAft>
+                <a:spcPts val="1000"/>
+              </a:spcAft>
+              <a:buNone/>
+            </a:pPr>
+            <a:r>
+              <a:rPr lang="en-US" sz="2300" b="1" dirty="0">
+                <a:solidFill>
+                  <a:srgbClr val="F2F0EA"/>
+                </a:solidFill>
+                <a:latin typeface="Georgia" pitchFamily="34" charset="0"/>
+                <a:ea typeface="Georgia" pitchFamily="34" charset="-122"/>
+                <a:cs typeface="Georgia" pitchFamily="34" charset="-120"/>
+              </a:rPr>
+              <a:t>Recurso relâmpago</a:t>
+            </a:r>
+            <a:pPr indent="0" marL="0">
+              <a:lnSpc>
+                <a:spcPct val="120000"/>
+              </a:lnSpc>
+              <a:spcAft>
+                <a:spcPts val="1000"/>
+              </a:spcAft>
+              <a:buNone/>
+            </a:pPr>
+            <a:r>
+              <a:rPr lang="en-US" sz="2300" dirty="0">
+                <a:solidFill>
+                  <a:srgbClr val="F2F0EA"/>
+                </a:solidFill>
+                <a:latin typeface="Georgia" pitchFamily="34" charset="0"/>
+                <a:ea typeface="Georgia" pitchFamily="34" charset="-122"/>
+                <a:cs typeface="Georgia" pitchFamily="34" charset="-120"/>
+              </a:rPr>
+              <a:t>; 3. </a:t>
+            </a:r>
+            <a:pPr indent="0" marL="0">
+              <a:lnSpc>
+                <a:spcPct val="120000"/>
+              </a:lnSpc>
+              <a:spcAft>
+                <a:spcPts val="1000"/>
+              </a:spcAft>
+              <a:buNone/>
+            </a:pPr>
+            <a:r>
+              <a:rPr lang="en-US" sz="2300" b="1" dirty="0">
+                <a:solidFill>
+                  <a:srgbClr val="F2F0EA"/>
+                </a:solidFill>
+                <a:latin typeface="Georgia" pitchFamily="34" charset="0"/>
+                <a:ea typeface="Georgia" pitchFamily="34" charset="-122"/>
+                <a:cs typeface="Georgia" pitchFamily="34" charset="-120"/>
+              </a:rPr>
+              <a:t>Métrica ao vivo</a:t>
+            </a:r>
+            <a:pPr indent="0" marL="0">
+              <a:lnSpc>
+                <a:spcPct val="120000"/>
+              </a:lnSpc>
+              <a:spcAft>
+                <a:spcPts val="1000"/>
+              </a:spcAft>
+              <a:buNone/>
+            </a:pPr>
+            <a:r>
+              <a:rPr lang="en-US" sz="2300" dirty="0">
+                <a:solidFill>
+                  <a:srgbClr val="F2F0EA"/>
+                </a:solidFill>
+                <a:latin typeface="Georgia" pitchFamily="34" charset="0"/>
+                <a:ea typeface="Georgia" pitchFamily="34" charset="-122"/>
+                <a:cs typeface="Georgia" pitchFamily="34" charset="-120"/>
+              </a:rPr>
+              <a:t> (contar sílabas); 4. </a:t>
+            </a:r>
+            <a:pPr indent="0" marL="0">
+              <a:lnSpc>
+                <a:spcPct val="120000"/>
+              </a:lnSpc>
+              <a:spcAft>
+                <a:spcPts val="1000"/>
+              </a:spcAft>
+              <a:buNone/>
+            </a:pPr>
+            <a:r>
+              <a:rPr lang="en-US" sz="2300" b="1" dirty="0">
+                <a:solidFill>
+                  <a:srgbClr val="F2F0EA"/>
+                </a:solidFill>
+                <a:latin typeface="Georgia" pitchFamily="34" charset="0"/>
+                <a:ea typeface="Georgia" pitchFamily="34" charset="-122"/>
+                <a:cs typeface="Georgia" pitchFamily="34" charset="-120"/>
+              </a:rPr>
+              <a:t>Defende em 30 segundos</a:t>
+            </a:r>
+            <a:pPr indent="0" marL="0">
+              <a:lnSpc>
+                <a:spcPct val="120000"/>
+              </a:lnSpc>
+              <a:spcAft>
+                <a:spcPts val="1000"/>
+              </a:spcAft>
+              <a:buNone/>
+            </a:pPr>
+            <a:r>
+              <a:rPr lang="en-US" sz="2300" dirty="0">
+                <a:solidFill>
+                  <a:srgbClr val="F2F0EA"/>
+                </a:solidFill>
+                <a:latin typeface="Georgia" pitchFamily="34" charset="0"/>
+                <a:ea typeface="Georgia" pitchFamily="34" charset="-122"/>
+                <a:cs typeface="Georgia" pitchFamily="34" charset="-120"/>
+              </a:rPr>
+              <a:t> (uma tese sobre Camões).</a:t>
             </a:r>
             <a:endParaRPr lang="en-US" sz="2300" dirty="0"/>
           </a:p>
